--- a/docs/SitePulse_HR_Presentation.pptx
+++ b/docs/SitePulse_HR_Presentation.pptx
@@ -1685,7 +1685,8 @@
           <a:p>
             <a:r>
               <a:rPr lang="en-US" dirty="0"/>
-              <a:t>Site assignment is the second half of the permission. A timekeeper on Project A cannot open Project B's attendance at all.</a:t>
+              <a:t>Site assignment is the second half of the permission. A timekeeper on Project A cannot open Project B's attendance at all.
+If asked why Supervisor and Foreman are listed separately: they carry the same access. They are kept apart because they are two real job titles, and the role is stamped on every attendance record, so you can tell which of them marked it. They can be merged into one role if HR would rather have five.</a:t>
             </a:r>
             <a:endParaRPr lang="en-US" dirty="0"/>
           </a:p>
@@ -10620,7 +10621,7 @@
                 <a:ea typeface="Calibri" pitchFamily="34" charset="-122"/>
                 <a:cs typeface="Calibri" pitchFamily="34" charset="-120"/>
               </a:rPr>
-              <a:t>Marks attendance and reads manpower for the projects they hold.</a:t>
+              <a:t>Marks attendance, reads manpower and raises transfers for their projects.</a:t>
             </a:r>
             <a:endParaRPr lang="en-US" sz="1050" dirty="0"/>
           </a:p>
@@ -10795,7 +10796,7 @@
                 <a:ea typeface="Calibri" pitchFamily="34" charset="-122"/>
                 <a:cs typeface="Calibri" pitchFamily="34" charset="-120"/>
               </a:rPr>
-              <a:t>Marks attendance at the gate and raises transfers for workers who turn up.</a:t>
+              <a:t>Same access as Supervisor — a separate title so records show who marked what.</a:t>
             </a:r>
             <a:endParaRPr lang="en-US" sz="1050" dirty="0"/>
           </a:p>

--- a/docs/SitePulse_HR_Presentation.pptx
+++ b/docs/SitePulse_HR_Presentation.pptx
@@ -1686,7 +1686,7 @@
             <a:r>
               <a:rPr lang="en-US" dirty="0"/>
               <a:t>Site assignment is the second half of the permission. A timekeeper on Project A cannot open Project B's attendance at all.
-If asked why Supervisor and Foreman are listed separately: they carry the same access. They are kept apart because they are two real job titles, and the role is stamped on every attendance record, so you can tell which of them marked it. They can be merged into one role if HR would rather have five.</a:t>
+There used to be a sixth role, Foreman, carrying permissions identical to Supervisor. It was merged in, since at KTC it is the same job. Logins created as Foreman before the merge keep working unchanged and now read as Supervisor.</a:t>
             </a:r>
             <a:endParaRPr lang="en-US" dirty="0"/>
           </a:p>
@@ -3276,7 +3276,7 @@
                 <a:ea typeface="Cambria" pitchFamily="34" charset="-122"/>
                 <a:cs typeface="Cambria" pitchFamily="34" charset="-120"/>
               </a:rPr>
-              <a:t>44</a:t>
+              <a:t>48</a:t>
             </a:r>
             <a:endParaRPr lang="en-US" sz="6000" dirty="0"/>
           </a:p>
@@ -3357,7 +3357,7 @@
                 <a:ea typeface="Calibri" pitchFamily="34" charset="-122"/>
                 <a:cs typeface="Calibri" pitchFamily="34" charset="-120"/>
               </a:rPr>
-              <a:t>Each one checks a permission that must be granted — and one that must be refused. All 44 pass.</a:t>
+              <a:t>Each one checks a permission that must be granted — and one that must be refused. All 48 pass.</a:t>
             </a:r>
             <a:endParaRPr lang="en-US" sz="1000" dirty="0"/>
           </a:p>
@@ -6492,7 +6492,7 @@
                 <a:ea typeface="Cambria" pitchFamily="34" charset="-122"/>
                 <a:cs typeface="Cambria" pitchFamily="34" charset="-120"/>
               </a:rPr>
-              <a:t>6</a:t>
+              <a:t>5</a:t>
             </a:r>
             <a:endParaRPr lang="en-US" sz="3200" dirty="0"/>
           </a:p>
@@ -6570,7 +6570,7 @@
                 <a:ea typeface="Cambria" pitchFamily="34" charset="-122"/>
                 <a:cs typeface="Cambria" pitchFamily="34" charset="-120"/>
               </a:rPr>
-              <a:t>44</a:t>
+              <a:t>48</a:t>
             </a:r>
             <a:endParaRPr lang="en-US" sz="3200" dirty="0"/>
           </a:p>
@@ -8026,7 +8026,7 @@
                 <a:ea typeface="Cambria" pitchFamily="34" charset="-122"/>
                 <a:cs typeface="Cambria" pitchFamily="34" charset="-120"/>
               </a:rPr>
-              <a:t>6</a:t>
+              <a:t>5</a:t>
             </a:r>
             <a:endParaRPr lang="en-US" sz="4000" dirty="0"/>
           </a:p>
@@ -9874,7 +9874,7 @@
               <a:buNone/>
             </a:pPr>
             <a:r>
-              <a:rPr lang="en-US" sz="3200" b="1" dirty="0">
+              <a:rPr lang="en-US" sz="3000" b="1" dirty="0">
                 <a:solidFill>
                   <a:srgbClr val="00113D"/>
                 </a:solidFill>
@@ -9882,9 +9882,9 @@
                 <a:ea typeface="Cambria" pitchFamily="34" charset="-122"/>
                 <a:cs typeface="Cambria" pitchFamily="34" charset="-120"/>
               </a:rPr>
-              <a:t>Six roles, each seeing only their own work</a:t>
-            </a:r>
-            <a:endParaRPr lang="en-US" sz="3200" dirty="0"/>
+              <a:t>Five roles, scoped to their own projects</a:t>
+            </a:r>
+            <a:endParaRPr lang="en-US" sz="3000" dirty="0"/>
           </a:p>
         </p:txBody>
       </p:sp>
@@ -10669,181 +10669,6 @@
             <a:avLst/>
           </a:prstGeom>
           <a:solidFill>
-            <a:srgbClr val="B8842E"/>
-          </a:solidFill>
-          <a:ln w="12700">
-            <a:solidFill>
-              <a:srgbClr val="B8842E"/>
-            </a:solidFill>
-            <a:prstDash val="solid"/>
-          </a:ln>
-        </p:spPr>
-      </p:sp>
-      <p:sp>
-        <p:nvSpPr>
-          <p:cNvPr id="26" name="Text 24"/>
-          <p:cNvSpPr txBox="1"/>
-          <p:nvPr/>
-        </p:nvSpPr>
-        <p:spPr>
-          <a:xfrm>
-            <a:off x="3502152" y="3145536"/>
-            <a:ext cx="384048" cy="384048"/>
-          </a:xfrm>
-          <a:prstGeom prst="rect">
-            <a:avLst/>
-          </a:prstGeom>
-          <a:noFill/>
-          <a:ln/>
-        </p:spPr>
-        <p:txBody>
-          <a:bodyPr wrap="square" lIns="0" tIns="0" rIns="0" bIns="0" rtlCol="0" anchor="ctr"/>
-          <a:lstStyle/>
-          <a:p>
-            <a:pPr algn="ctr" indent="0" marL="0">
-              <a:buNone/>
-            </a:pPr>
-            <a:r>
-              <a:rPr lang="en-US" sz="1200" b="1" dirty="0">
-                <a:solidFill>
-                  <a:srgbClr val="FFFFFF"/>
-                </a:solidFill>
-                <a:latin typeface="Calibri" pitchFamily="34" charset="0"/>
-                <a:ea typeface="Calibri" pitchFamily="34" charset="-122"/>
-                <a:cs typeface="Calibri" pitchFamily="34" charset="-120"/>
-              </a:rPr>
-              <a:t>F</a:t>
-            </a:r>
-            <a:endParaRPr lang="en-US" sz="1200" dirty="0"/>
-          </a:p>
-        </p:txBody>
-      </p:sp>
-      <p:sp>
-        <p:nvSpPr>
-          <p:cNvPr id="27" name="Text 25"/>
-          <p:cNvSpPr txBox="1"/>
-          <p:nvPr/>
-        </p:nvSpPr>
-        <p:spPr>
-          <a:xfrm>
-            <a:off x="3977640" y="3182112"/>
-            <a:ext cx="1755648" cy="274320"/>
-          </a:xfrm>
-          <a:prstGeom prst="rect">
-            <a:avLst/>
-          </a:prstGeom>
-          <a:noFill/>
-          <a:ln/>
-        </p:spPr>
-        <p:txBody>
-          <a:bodyPr wrap="square" lIns="0" tIns="0" rIns="0" bIns="0" rtlCol="0" anchor="t"/>
-          <a:lstStyle/>
-          <a:p>
-            <a:pPr algn="l" indent="0" marL="0">
-              <a:lnSpc>
-                <a:spcPct val="110000"/>
-              </a:lnSpc>
-              <a:buNone/>
-            </a:pPr>
-            <a:r>
-              <a:rPr lang="en-US" sz="1300" b="1" dirty="0">
-                <a:solidFill>
-                  <a:srgbClr val="141F1A"/>
-                </a:solidFill>
-                <a:latin typeface="Calibri" pitchFamily="34" charset="0"/>
-                <a:ea typeface="Calibri" pitchFamily="34" charset="-122"/>
-                <a:cs typeface="Calibri" pitchFamily="34" charset="-120"/>
-              </a:rPr>
-              <a:t>Foreman</a:t>
-            </a:r>
-            <a:endParaRPr lang="en-US" sz="1300" dirty="0"/>
-          </a:p>
-        </p:txBody>
-      </p:sp>
-      <p:sp>
-        <p:nvSpPr>
-          <p:cNvPr id="28" name="Text 26"/>
-          <p:cNvSpPr txBox="1"/>
-          <p:nvPr/>
-        </p:nvSpPr>
-        <p:spPr>
-          <a:xfrm>
-            <a:off x="3502152" y="3639312"/>
-            <a:ext cx="2157984" cy="566928"/>
-          </a:xfrm>
-          <a:prstGeom prst="rect">
-            <a:avLst/>
-          </a:prstGeom>
-          <a:noFill/>
-          <a:ln/>
-        </p:spPr>
-        <p:txBody>
-          <a:bodyPr wrap="square" lIns="0" tIns="0" rIns="0" bIns="0" rtlCol="0" anchor="t"/>
-          <a:lstStyle/>
-          <a:p>
-            <a:pPr algn="l" indent="0" marL="0">
-              <a:lnSpc>
-                <a:spcPct val="110000"/>
-              </a:lnSpc>
-              <a:buNone/>
-            </a:pPr>
-            <a:r>
-              <a:rPr lang="en-US" sz="1050" dirty="0">
-                <a:solidFill>
-                  <a:srgbClr val="5B6B63"/>
-                </a:solidFill>
-                <a:latin typeface="Calibri" pitchFamily="34" charset="0"/>
-                <a:ea typeface="Calibri" pitchFamily="34" charset="-122"/>
-                <a:cs typeface="Calibri" pitchFamily="34" charset="-120"/>
-              </a:rPr>
-              <a:t>Same access as Supervisor — a separate title so records show who marked what.</a:t>
-            </a:r>
-            <a:endParaRPr lang="en-US" sz="1050" dirty="0"/>
-          </a:p>
-        </p:txBody>
-      </p:sp>
-      <p:sp>
-        <p:nvSpPr>
-          <p:cNvPr id="29" name="Shape 27"/>
-          <p:cNvSpPr/>
-          <p:nvPr/>
-        </p:nvSpPr>
-        <p:spPr>
-          <a:xfrm>
-            <a:off x="6108192" y="2944368"/>
-            <a:ext cx="2578608" cy="1371600"/>
-          </a:xfrm>
-          <a:prstGeom prst="roundRect">
-            <a:avLst>
-              <a:gd name="adj" fmla="val 6000"/>
-            </a:avLst>
-          </a:prstGeom>
-          <a:solidFill>
-            <a:srgbClr val="F5F7F5"/>
-          </a:solidFill>
-          <a:ln w="9525">
-            <a:solidFill>
-              <a:srgbClr val="DEE6E1"/>
-            </a:solidFill>
-            <a:prstDash val="solid"/>
-          </a:ln>
-        </p:spPr>
-      </p:sp>
-      <p:sp>
-        <p:nvSpPr>
-          <p:cNvPr id="30" name="Shape 28"/>
-          <p:cNvSpPr/>
-          <p:nvPr/>
-        </p:nvSpPr>
-        <p:spPr>
-          <a:xfrm>
-            <a:off x="6327648" y="3145536"/>
-            <a:ext cx="384048" cy="384048"/>
-          </a:xfrm>
-          <a:prstGeom prst="ellipse">
-            <a:avLst/>
-          </a:prstGeom>
-          <a:solidFill>
             <a:srgbClr val="5B6B63"/>
           </a:solidFill>
           <a:ln w="12700">
@@ -10856,13 +10681,13 @@
       </p:sp>
       <p:sp>
         <p:nvSpPr>
-          <p:cNvPr id="31" name="Text 29"/>
-          <p:cNvSpPr txBox="1"/>
-          <p:nvPr/>
-        </p:nvSpPr>
-        <p:spPr>
-          <a:xfrm>
-            <a:off x="6327648" y="3145536"/>
+          <p:cNvPr id="26" name="Text 24"/>
+          <p:cNvSpPr txBox="1"/>
+          <p:nvPr/>
+        </p:nvSpPr>
+        <p:spPr>
+          <a:xfrm>
+            <a:off x="3502152" y="3145536"/>
             <a:ext cx="384048" cy="384048"/>
           </a:xfrm>
           <a:prstGeom prst="rect">
@@ -10895,13 +10720,13 @@
       </p:sp>
       <p:sp>
         <p:nvSpPr>
-          <p:cNvPr id="32" name="Text 30"/>
-          <p:cNvSpPr txBox="1"/>
-          <p:nvPr/>
-        </p:nvSpPr>
-        <p:spPr>
-          <a:xfrm>
-            <a:off x="6803136" y="3182112"/>
+          <p:cNvPr id="27" name="Text 25"/>
+          <p:cNvSpPr txBox="1"/>
+          <p:nvPr/>
+        </p:nvSpPr>
+        <p:spPr>
+          <a:xfrm>
+            <a:off x="3977640" y="3182112"/>
             <a:ext cx="1755648" cy="274320"/>
           </a:xfrm>
           <a:prstGeom prst="rect">
@@ -10937,13 +10762,13 @@
       </p:sp>
       <p:sp>
         <p:nvSpPr>
-          <p:cNvPr id="33" name="Text 31"/>
-          <p:cNvSpPr txBox="1"/>
-          <p:nvPr/>
-        </p:nvSpPr>
-        <p:spPr>
-          <a:xfrm>
-            <a:off x="6327648" y="3639312"/>
+          <p:cNvPr id="28" name="Text 26"/>
+          <p:cNvSpPr txBox="1"/>
+          <p:nvPr/>
+        </p:nvSpPr>
+        <p:spPr>
+          <a:xfrm>
+            <a:off x="3502152" y="3639312"/>
             <a:ext cx="2157984" cy="566928"/>
           </a:xfrm>
           <a:prstGeom prst="rect">
@@ -10979,7 +10804,118 @@
       </p:sp>
       <p:sp>
         <p:nvSpPr>
-          <p:cNvPr id="34" name="Text 32"/>
+          <p:cNvPr id="29" name="Shape 27"/>
+          <p:cNvSpPr/>
+          <p:nvPr/>
+        </p:nvSpPr>
+        <p:spPr>
+          <a:xfrm>
+            <a:off x="6108192" y="2944368"/>
+            <a:ext cx="2578608" cy="1371600"/>
+          </a:xfrm>
+          <a:prstGeom prst="roundRect">
+            <a:avLst>
+              <a:gd name="adj" fmla="val 6000"/>
+            </a:avLst>
+          </a:prstGeom>
+          <a:solidFill>
+            <a:srgbClr val="E8F1FC"/>
+          </a:solidFill>
+          <a:ln w="9525">
+            <a:solidFill>
+              <a:srgbClr val="DEE6E1"/>
+            </a:solidFill>
+            <a:prstDash val="solid"/>
+          </a:ln>
+        </p:spPr>
+      </p:sp>
+      <p:sp>
+        <p:nvSpPr>
+          <p:cNvPr id="30" name="Text 28"/>
+          <p:cNvSpPr txBox="1"/>
+          <p:nvPr/>
+        </p:nvSpPr>
+        <p:spPr>
+          <a:xfrm>
+            <a:off x="6327648" y="3145536"/>
+            <a:ext cx="2157984" cy="256032"/>
+          </a:xfrm>
+          <a:prstGeom prst="rect">
+            <a:avLst/>
+          </a:prstGeom>
+          <a:noFill/>
+          <a:ln/>
+        </p:spPr>
+        <p:txBody>
+          <a:bodyPr wrap="square" lIns="0" tIns="0" rIns="0" bIns="0" rtlCol="0" anchor="t"/>
+          <a:lstStyle/>
+          <a:p>
+            <a:pPr algn="l" indent="0" marL="0">
+              <a:lnSpc>
+                <a:spcPct val="110000"/>
+              </a:lnSpc>
+              <a:buNone/>
+            </a:pPr>
+            <a:r>
+              <a:rPr lang="en-US" sz="1300" b="1" dirty="0">
+                <a:solidFill>
+                  <a:srgbClr val="00113D"/>
+                </a:solidFill>
+                <a:latin typeface="Calibri" pitchFamily="34" charset="0"/>
+                <a:ea typeface="Calibri" pitchFamily="34" charset="-122"/>
+                <a:cs typeface="Calibri" pitchFamily="34" charset="-120"/>
+              </a:rPr>
+              <a:t>Foreman</a:t>
+            </a:r>
+            <a:endParaRPr lang="en-US" sz="1300" dirty="0"/>
+          </a:p>
+        </p:txBody>
+      </p:sp>
+      <p:sp>
+        <p:nvSpPr>
+          <p:cNvPr id="31" name="Text 29"/>
+          <p:cNvSpPr txBox="1"/>
+          <p:nvPr/>
+        </p:nvSpPr>
+        <p:spPr>
+          <a:xfrm>
+            <a:off x="6327648" y="3456432"/>
+            <a:ext cx="2157984" cy="749808"/>
+          </a:xfrm>
+          <a:prstGeom prst="rect">
+            <a:avLst/>
+          </a:prstGeom>
+          <a:noFill/>
+          <a:ln/>
+        </p:spPr>
+        <p:txBody>
+          <a:bodyPr wrap="square" lIns="0" tIns="0" rIns="0" bIns="0" rtlCol="0" anchor="t"/>
+          <a:lstStyle/>
+          <a:p>
+            <a:pPr algn="l" indent="0" marL="0">
+              <a:lnSpc>
+                <a:spcPct val="110000"/>
+              </a:lnSpc>
+              <a:buNone/>
+            </a:pPr>
+            <a:r>
+              <a:rPr lang="en-US" sz="1000" dirty="0">
+                <a:solidFill>
+                  <a:srgbClr val="5B6B63"/>
+                </a:solidFill>
+                <a:latin typeface="Calibri" pitchFamily="34" charset="0"/>
+                <a:ea typeface="Calibri" pitchFamily="34" charset="-122"/>
+                <a:cs typeface="Calibri" pitchFamily="34" charset="-120"/>
+              </a:rPr>
+              <a:t>Merged into Supervisor — same job at KTC. Logins created as Foreman still work, and now read as Supervisor.</a:t>
+            </a:r>
+            <a:endParaRPr lang="en-US" sz="1000" dirty="0"/>
+          </a:p>
+        </p:txBody>
+      </p:sp>
+      <p:sp>
+        <p:nvSpPr>
+          <p:cNvPr id="32" name="Text 30"/>
           <p:cNvSpPr txBox="1"/>
           <p:nvPr/>
         </p:nvSpPr>

--- a/docs/SitePulse_HR_Presentation.pptx
+++ b/docs/SitePulse_HR_Presentation.pptx
@@ -183,7 +183,7 @@
           </c:spPr>
           <c:invertIfNegative val="0"/>
           <c:dLbls>
-            <c:numFmt formatCode="#,##0" sourceLinked="0"/>
+            <c:numFmt formatCode="0.0" sourceLinked="0"/>
             <c:txPr>
               <a:bodyPr/>
               <a:lstStyle/>
@@ -265,7 +265,7 @@
           </c:val>
         </c:ser>
         <c:dLbls>
-          <c:numFmt formatCode="#,##0" sourceLinked="0"/>
+          <c:numFmt formatCode="0.0" sourceLinked="0"/>
           <c:txPr>
             <a:bodyPr/>
             <a:lstStyle/>
@@ -2714,7 +2714,7 @@
         </p:nvSpPr>
         <p:spPr>
           <a:xfrm>
-            <a:off x="457200" y="905256"/>
+            <a:off x="457200" y="932688"/>
             <a:ext cx="8229600" cy="310896"/>
           </a:xfrm>
           <a:prstGeom prst="rect">
@@ -3467,7 +3467,7 @@
                 <a:ea typeface="Cambria" pitchFamily="34" charset="-122"/>
                 <a:cs typeface="Cambria" pitchFamily="34" charset="-120"/>
               </a:rPr>
-              <a:t>Built and measured for 4,000 workers</a:t>
+              <a:t>Measured for 4,000 workers</a:t>
             </a:r>
             <a:endParaRPr lang="en-US" sz="3200" dirty="0"/>
           </a:p>
@@ -3481,7 +3481,7 @@
         </p:nvSpPr>
         <p:spPr>
           <a:xfrm>
-            <a:off x="457200" y="905256"/>
+            <a:off x="457200" y="932688"/>
             <a:ext cx="8229600" cy="310896"/>
           </a:xfrm>
           <a:prstGeom prst="rect">
@@ -4090,7 +4090,7 @@
         </p:nvSpPr>
         <p:spPr>
           <a:xfrm>
-            <a:off x="457200" y="905256"/>
+            <a:off x="457200" y="932688"/>
             <a:ext cx="8229600" cy="310896"/>
           </a:xfrm>
           <a:prstGeom prst="rect">
@@ -5250,7 +5250,7 @@
         </p:nvSpPr>
         <p:spPr>
           <a:xfrm>
-            <a:off x="457200" y="905256"/>
+            <a:off x="457200" y="932688"/>
             <a:ext cx="8229600" cy="310896"/>
           </a:xfrm>
           <a:prstGeom prst="rect">
@@ -6719,7 +6719,7 @@
                 <a:ea typeface="Cambria" pitchFamily="34" charset="-122"/>
                 <a:cs typeface="Cambria" pitchFamily="34" charset="-120"/>
               </a:rPr>
-              <a:t>Where attendance breaks down today</a:t>
+              <a:t>Where attendance breaks down</a:t>
             </a:r>
             <a:endParaRPr lang="en-US" sz="3200" dirty="0"/>
           </a:p>
@@ -6733,7 +6733,7 @@
         </p:nvSpPr>
         <p:spPr>
           <a:xfrm>
-            <a:off x="457200" y="905256"/>
+            <a:off x="457200" y="932688"/>
             <a:ext cx="8229600" cy="310896"/>
           </a:xfrm>
           <a:prstGeom prst="rect">
@@ -7529,7 +7529,7 @@
                 <a:ea typeface="Cambria" pitchFamily="34" charset="-122"/>
                 <a:cs typeface="Cambria" pitchFamily="34" charset="-120"/>
               </a:rPr>
-              <a:t>One system, two apps, one live database</a:t>
+              <a:t>Two apps, one live database</a:t>
             </a:r>
             <a:endParaRPr lang="en-US" sz="3200" dirty="0"/>
           </a:p>
@@ -7543,7 +7543,7 @@
         </p:nvSpPr>
         <p:spPr>
           <a:xfrm>
-            <a:off x="457200" y="905256"/>
+            <a:off x="457200" y="932688"/>
             <a:ext cx="8229600" cy="310896"/>
           </a:xfrm>
           <a:prstGeom prst="rect">
@@ -8306,7 +8306,7 @@
         </p:nvSpPr>
         <p:spPr>
           <a:xfrm>
-            <a:off x="457200" y="905256"/>
+            <a:off x="457200" y="932688"/>
             <a:ext cx="8229600" cy="310896"/>
           </a:xfrm>
           <a:prstGeom prst="rect">
@@ -9180,7 +9180,7 @@
                 <a:ea typeface="Cambria" pitchFamily="34" charset="-122"/>
                 <a:cs typeface="Cambria" pitchFamily="34" charset="-120"/>
               </a:rPr>
-              <a:t>Proof that the man was actually there</a:t>
+              <a:t>Proof the man was there</a:t>
             </a:r>
             <a:endParaRPr lang="en-US" sz="3200" dirty="0"/>
           </a:p>
@@ -9194,7 +9194,7 @@
         </p:nvSpPr>
         <p:spPr>
           <a:xfrm>
-            <a:off x="457200" y="905256"/>
+            <a:off x="457200" y="932688"/>
             <a:ext cx="8229600" cy="310896"/>
           </a:xfrm>
           <a:prstGeom prst="rect">
@@ -9874,7 +9874,7 @@
               <a:buNone/>
             </a:pPr>
             <a:r>
-              <a:rPr lang="en-US" sz="3000" b="1" dirty="0">
+              <a:rPr lang="en-US" sz="3200" b="1" dirty="0">
                 <a:solidFill>
                   <a:srgbClr val="00113D"/>
                 </a:solidFill>
@@ -9882,9 +9882,9 @@
                 <a:ea typeface="Cambria" pitchFamily="34" charset="-122"/>
                 <a:cs typeface="Cambria" pitchFamily="34" charset="-120"/>
               </a:rPr>
-              <a:t>Five roles, scoped to their own projects</a:t>
-            </a:r>
-            <a:endParaRPr lang="en-US" sz="3000" dirty="0"/>
+              <a:t>Five roles, scoped by project</a:t>
+            </a:r>
+            <a:endParaRPr lang="en-US" sz="3200" dirty="0"/>
           </a:p>
         </p:txBody>
       </p:sp>
@@ -9896,7 +9896,7 @@
         </p:nvSpPr>
         <p:spPr>
           <a:xfrm>
-            <a:off x="457200" y="905256"/>
+            <a:off x="457200" y="932688"/>
             <a:ext cx="8229600" cy="310896"/>
           </a:xfrm>
           <a:prstGeom prst="rect">
@@ -10012,7 +10012,7 @@
                 <a:ea typeface="Calibri" pitchFamily="34" charset="-122"/>
                 <a:cs typeface="Calibri" pitchFamily="34" charset="-120"/>
               </a:rPr>
-              <a:t>S</a:t>
+              <a:t>SA</a:t>
             </a:r>
             <a:endParaRPr lang="en-US" sz="1200" dirty="0"/>
           </a:p>
@@ -10362,7 +10362,7 @@
                 <a:ea typeface="Calibri" pitchFamily="34" charset="-122"/>
                 <a:cs typeface="Calibri" pitchFamily="34" charset="-120"/>
               </a:rPr>
-              <a:t>T</a:t>
+              <a:t>TK</a:t>
             </a:r>
             <a:endParaRPr lang="en-US" sz="1200" dirty="0"/>
           </a:p>
@@ -10537,7 +10537,7 @@
                 <a:ea typeface="Calibri" pitchFamily="34" charset="-122"/>
                 <a:cs typeface="Calibri" pitchFamily="34" charset="-120"/>
               </a:rPr>
-              <a:t>S</a:t>
+              <a:t>SV</a:t>
             </a:r>
             <a:endParaRPr lang="en-US" sz="1200" dirty="0"/>
           </a:p>
@@ -10712,7 +10712,7 @@
                 <a:ea typeface="Calibri" pitchFamily="34" charset="-122"/>
                 <a:cs typeface="Calibri" pitchFamily="34" charset="-120"/>
               </a:rPr>
-              <a:t>S</a:t>
+              <a:t>ST</a:t>
             </a:r>
             <a:endParaRPr lang="en-US" sz="1200" dirty="0"/>
           </a:p>
@@ -11031,7 +11031,7 @@
         </p:nvSpPr>
         <p:spPr>
           <a:xfrm>
-            <a:off x="457200" y="905256"/>
+            <a:off x="457200" y="932688"/>
             <a:ext cx="8229600" cy="310896"/>
           </a:xfrm>
           <a:prstGeom prst="rect">
@@ -12005,7 +12005,7 @@
         </p:nvSpPr>
         <p:spPr>
           <a:xfrm>
-            <a:off x="457200" y="905256"/>
+            <a:off x="457200" y="932688"/>
             <a:ext cx="8229600" cy="310896"/>
           </a:xfrm>
           <a:prstGeom prst="rect">
@@ -13072,7 +13072,7 @@
         </p:nvSpPr>
         <p:spPr>
           <a:xfrm>
-            <a:off x="457200" y="905256"/>
+            <a:off x="457200" y="932688"/>
             <a:ext cx="8229600" cy="310896"/>
           </a:xfrm>
           <a:prstGeom prst="rect">
